--- a/ppt/Grade10/G10_S35_Refraction_at_Plane_Surfaces_2.pptx
+++ b/ppt/Grade10/G10_S35_Refraction_at_Plane_Surfaces_2.pptx
@@ -4882,7 +4882,7 @@
                 </a:solidFill>
                 <a:latin typeface="Calibri"/>
               </a:rPr>
-              <a:t>Quick Check — Prism &amp; Depth</a:t>
+              <a:t>Check Your Understanding</a:t>
             </a:r>
           </a:p>
         </p:txBody>
@@ -5101,7 +5101,7 @@
                 </a:solidFill>
                 <a:latin typeface="Calibri"/>
               </a:rPr>
-              <a:t>Q1 — Prism</a:t>
+              <a:t>Q1 — Prism vs Slab</a:t>
             </a:r>
           </a:p>
         </p:txBody>
@@ -5188,7 +5188,7 @@
                 </a:solidFill>
                 <a:latin typeface="Calibri"/>
               </a:rPr>
-              <a:t>Light passing through a triangular prism bends toward the:</a:t>
+              <a:t>How does a prism differ from a parallel-sided glass slab in its effect on a ray of light?</a:t>
             </a:r>
           </a:p>
         </p:txBody>
@@ -5348,7 +5348,7 @@
                 </a:solidFill>
                 <a:latin typeface="Calibri"/>
               </a:rPr>
-              <a:t>Apex (top)</a:t>
+              <a:t>Both leave the ray parallel to the incident ray</a:t>
             </a:r>
           </a:p>
         </p:txBody>
@@ -5508,7 +5508,7 @@
                 </a:solidFill>
                 <a:latin typeface="Calibri"/>
               </a:rPr>
-              <a:t>Base</a:t>
+              <a:t>A prism deviates the ray; a slab only shifts it sideways</a:t>
             </a:r>
           </a:p>
         </p:txBody>
@@ -5668,7 +5668,7 @@
                 </a:solidFill>
                 <a:latin typeface="Calibri"/>
               </a:rPr>
-              <a:t>Normal at exit</a:t>
+              <a:t>A slab deviates the ray; a prism only shifts it</a:t>
             </a:r>
           </a:p>
         </p:txBody>
@@ -5828,7 +5828,7 @@
                 </a:solidFill>
                 <a:latin typeface="Calibri"/>
               </a:rPr>
-              <a:t>Incident ray</a:t>
+              <a:t>Neither changes the ray's direction</a:t>
             </a:r>
           </a:p>
         </p:txBody>
@@ -6012,7 +6012,7 @@
                 </a:solidFill>
                 <a:latin typeface="Calibri"/>
               </a:rPr>
-              <a:t>Q1 — Prism</a:t>
+              <a:t>Q1 — Prism vs Slab</a:t>
             </a:r>
           </a:p>
         </p:txBody>
@@ -6099,7 +6099,7 @@
                 </a:solidFill>
                 <a:latin typeface="Calibri"/>
               </a:rPr>
-              <a:t>Light passing through a triangular prism bends toward the:</a:t>
+              <a:t>How does a prism differ from a parallel-sided glass slab in its effect on a ray of light?</a:t>
             </a:r>
           </a:p>
         </p:txBody>
@@ -6259,7 +6259,7 @@
                 </a:solidFill>
                 <a:latin typeface="Calibri"/>
               </a:rPr>
-              <a:t>Apex (top)</a:t>
+              <a:t>Both leave the ray parallel to the incident ray</a:t>
             </a:r>
           </a:p>
         </p:txBody>
@@ -6421,7 +6421,7 @@
                 </a:solidFill>
                 <a:latin typeface="Calibri"/>
               </a:rPr>
-              <a:t>Base</a:t>
+              <a:t>A prism deviates the ray; a slab only shifts it sideways</a:t>
             </a:r>
           </a:p>
         </p:txBody>
@@ -6581,7 +6581,7 @@
                 </a:solidFill>
                 <a:latin typeface="Calibri"/>
               </a:rPr>
-              <a:t>Normal at exit</a:t>
+              <a:t>A slab deviates the ray; a prism only shifts it</a:t>
             </a:r>
           </a:p>
         </p:txBody>
@@ -6741,7 +6741,7 @@
                 </a:solidFill>
                 <a:latin typeface="Calibri"/>
               </a:rPr>
-              <a:t>Incident ray</a:t>
+              <a:t>Neither changes the ray's direction</a:t>
             </a:r>
           </a:p>
         </p:txBody>
@@ -6867,7 +6867,7 @@
                 </a:solidFill>
                 <a:latin typeface="Calibri"/>
               </a:rPr>
-              <a:t>At both surfaces the ray bends in the same rotational sense, so the overall bending is toward the thicker part — the base of the prism.</a:t>
+              <a:t>A slab's faces are parallel, so the emergent ray is parallel to the incident ray (just shifted). A prism's faces are inclined, so the ray emerges in a new direction — deviated toward the base by the angle δ.</a:t>
             </a:r>
           </a:p>
         </p:txBody>
@@ -7138,7 +7138,7 @@
                 </a:solidFill>
                 <a:latin typeface="Calibri"/>
               </a:rPr>
-              <a:t>Compared with its real depth, a pond always appears:</a:t>
+              <a:t>A fish is 2.0 m below the surface of a pond (n = 1.33). To a person looking straight down, the fish appears to be about how deep?</a:t>
             </a:r>
           </a:p>
         </p:txBody>
@@ -7298,7 +7298,7 @@
                 </a:solidFill>
                 <a:latin typeface="Calibri"/>
               </a:rPr>
-              <a:t>Deeper</a:t>
+              <a:t>2.66 m</a:t>
             </a:r>
           </a:p>
         </p:txBody>
@@ -7458,7 +7458,7 @@
                 </a:solidFill>
                 <a:latin typeface="Calibri"/>
               </a:rPr>
-              <a:t>Shallower</a:t>
+              <a:t>2.0 m</a:t>
             </a:r>
           </a:p>
         </p:txBody>
@@ -7618,7 +7618,7 @@
                 </a:solidFill>
                 <a:latin typeface="Calibri"/>
               </a:rPr>
-              <a:t>The same</a:t>
+              <a:t>1.5 m</a:t>
             </a:r>
           </a:p>
         </p:txBody>
@@ -7778,7 +7778,7 @@
                 </a:solidFill>
                 <a:latin typeface="Calibri"/>
               </a:rPr>
-              <a:t>Twice as deep</a:t>
+              <a:t>1.33 m</a:t>
             </a:r>
           </a:p>
         </p:txBody>
@@ -8049,7 +8049,7 @@
                 </a:solidFill>
                 <a:latin typeface="Calibri"/>
               </a:rPr>
-              <a:t>Compared with its real depth, a pond always appears:</a:t>
+              <a:t>A fish is 2.0 m below the surface of a pond (n = 1.33). To a person looking straight down, the fish appears to be about how deep?</a:t>
             </a:r>
           </a:p>
         </p:txBody>
@@ -8209,7 +8209,7 @@
                 </a:solidFill>
                 <a:latin typeface="Calibri"/>
               </a:rPr>
-              <a:t>Deeper</a:t>
+              <a:t>2.66 m</a:t>
             </a:r>
           </a:p>
         </p:txBody>
@@ -8223,6 +8223,166 @@
         <p:spPr>
           <a:xfrm>
             <a:off x="6172200" y="3337560"/>
+            <a:ext cx="5349240" cy="868680"/>
+          </a:xfrm>
+          <a:prstGeom prst="roundRect">
+            <a:avLst>
+              <a:gd name="adj" fmla="val 12000"/>
+            </a:avLst>
+          </a:prstGeom>
+          <a:solidFill>
+            <a:srgbClr val="EAF1F4"/>
+          </a:solidFill>
+          <a:ln>
+            <a:noFill/>
+          </a:ln>
+          <a:effectLst/>
+        </p:spPr>
+        <p:style>
+          <a:lnRef idx="1">
+            <a:schemeClr val="accent1"/>
+          </a:lnRef>
+          <a:fillRef idx="3">
+            <a:schemeClr val="accent1"/>
+          </a:fillRef>
+          <a:effectRef idx="2">
+            <a:schemeClr val="accent1"/>
+          </a:effectRef>
+          <a:fontRef idx="minor">
+            <a:schemeClr val="lt1"/>
+          </a:fontRef>
+        </p:style>
+        <p:txBody>
+          <a:bodyPr rtlCol="0" anchor="ctr"/>
+          <a:lstStyle/>
+          <a:p>
+            <a:pPr algn="ctr"/>
+          </a:p>
+        </p:txBody>
+      </p:sp>
+      <p:sp>
+        <p:nvSpPr>
+          <p:cNvPr id="13" name="Oval 12"/>
+          <p:cNvSpPr/>
+          <p:nvPr/>
+        </p:nvSpPr>
+        <p:spPr>
+          <a:xfrm>
+            <a:off x="6446520" y="3566160"/>
+            <a:ext cx="411480" cy="411480"/>
+          </a:xfrm>
+          <a:prstGeom prst="ellipse">
+            <a:avLst/>
+          </a:prstGeom>
+          <a:solidFill>
+            <a:srgbClr val="B7C2CC"/>
+          </a:solidFill>
+          <a:ln>
+            <a:noFill/>
+          </a:ln>
+          <a:effectLst/>
+        </p:spPr>
+        <p:style>
+          <a:lnRef idx="1">
+            <a:schemeClr val="accent1"/>
+          </a:lnRef>
+          <a:fillRef idx="3">
+            <a:schemeClr val="accent1"/>
+          </a:fillRef>
+          <a:effectRef idx="2">
+            <a:schemeClr val="accent1"/>
+          </a:effectRef>
+          <a:fontRef idx="minor">
+            <a:schemeClr val="lt1"/>
+          </a:fontRef>
+        </p:style>
+        <p:txBody>
+          <a:bodyPr rtlCol="0" anchor="ctr"/>
+          <a:lstStyle/>
+          <a:p>
+            <a:pPr algn="ctr"/>
+          </a:p>
+        </p:txBody>
+      </p:sp>
+      <p:sp>
+        <p:nvSpPr>
+          <p:cNvPr id="14" name="TextBox 13"/>
+          <p:cNvSpPr txBox="1"/>
+          <p:nvPr/>
+        </p:nvSpPr>
+        <p:spPr>
+          <a:xfrm>
+            <a:off x="6446520" y="3566160"/>
+            <a:ext cx="411480" cy="411480"/>
+          </a:xfrm>
+          <a:prstGeom prst="rect">
+            <a:avLst/>
+          </a:prstGeom>
+          <a:noFill/>
+        </p:spPr>
+        <p:txBody>
+          <a:bodyPr wrap="square" anchor="ctr" lIns="0" rIns="0" tIns="0" bIns="0">
+            <a:spAutoFit/>
+          </a:bodyPr>
+          <a:lstStyle/>
+          <a:p>
+            <a:pPr algn="ctr"/>
+            <a:r>
+              <a:rPr sz="1400" b="1" i="0">
+                <a:solidFill>
+                  <a:srgbClr val="FFFFFF"/>
+                </a:solidFill>
+                <a:latin typeface="Calibri"/>
+              </a:rPr>
+              <a:t>B</a:t>
+            </a:r>
+          </a:p>
+        </p:txBody>
+      </p:sp>
+      <p:sp>
+        <p:nvSpPr>
+          <p:cNvPr id="15" name="TextBox 14"/>
+          <p:cNvSpPr txBox="1"/>
+          <p:nvPr/>
+        </p:nvSpPr>
+        <p:spPr>
+          <a:xfrm>
+            <a:off x="7040880" y="3337560"/>
+            <a:ext cx="4297680" cy="868680"/>
+          </a:xfrm>
+          <a:prstGeom prst="rect">
+            <a:avLst/>
+          </a:prstGeom>
+          <a:noFill/>
+        </p:spPr>
+        <p:txBody>
+          <a:bodyPr wrap="square" anchor="ctr" lIns="0" rIns="0" tIns="0" bIns="0">
+            <a:spAutoFit/>
+          </a:bodyPr>
+          <a:lstStyle/>
+          <a:p>
+            <a:pPr algn="l"/>
+            <a:r>
+              <a:rPr sz="1450" b="0" i="0">
+                <a:solidFill>
+                  <a:srgbClr val="6B7280"/>
+                </a:solidFill>
+                <a:latin typeface="Calibri"/>
+              </a:rPr>
+              <a:t>2.0 m</a:t>
+            </a:r>
+          </a:p>
+        </p:txBody>
+      </p:sp>
+      <p:sp>
+        <p:nvSpPr>
+          <p:cNvPr id="16" name="Rounded Rectangle 15"/>
+          <p:cNvSpPr/>
+          <p:nvPr/>
+        </p:nvSpPr>
+        <p:spPr>
+          <a:xfrm>
+            <a:off x="640080" y="4370831"/>
             <a:ext cx="5349240" cy="868680"/>
           </a:xfrm>
           <a:prstGeom prst="roundRect">
@@ -8264,13 +8424,13 @@
       </p:sp>
       <p:sp>
         <p:nvSpPr>
-          <p:cNvPr id="13" name="Oval 12"/>
+          <p:cNvPr id="17" name="Oval 16"/>
           <p:cNvSpPr/>
           <p:nvPr/>
         </p:nvSpPr>
         <p:spPr>
           <a:xfrm>
-            <a:off x="6446520" y="3566160"/>
+            <a:off x="914400" y="4599431"/>
             <a:ext cx="411480" cy="411480"/>
           </a:xfrm>
           <a:prstGeom prst="ellipse">
@@ -8308,13 +8468,13 @@
       </p:sp>
       <p:sp>
         <p:nvSpPr>
-          <p:cNvPr id="14" name="TextBox 13"/>
+          <p:cNvPr id="18" name="TextBox 17"/>
           <p:cNvSpPr txBox="1"/>
           <p:nvPr/>
         </p:nvSpPr>
         <p:spPr>
           <a:xfrm>
-            <a:off x="6446520" y="3566160"/>
+            <a:off x="914400" y="4599431"/>
             <a:ext cx="411480" cy="411480"/>
           </a:xfrm>
           <a:prstGeom prst="rect">
@@ -8343,13 +8503,13 @@
       </p:sp>
       <p:sp>
         <p:nvSpPr>
-          <p:cNvPr id="15" name="TextBox 14"/>
+          <p:cNvPr id="19" name="TextBox 18"/>
           <p:cNvSpPr txBox="1"/>
           <p:nvPr/>
         </p:nvSpPr>
         <p:spPr>
           <a:xfrm>
-            <a:off x="7040880" y="3337560"/>
+            <a:off x="1508760" y="4370831"/>
             <a:ext cx="4297680" cy="868680"/>
           </a:xfrm>
           <a:prstGeom prst="rect">
@@ -8371,20 +8531,20 @@
                 </a:solidFill>
                 <a:latin typeface="Calibri"/>
               </a:rPr>
-              <a:t>Shallower</a:t>
-            </a:r>
-          </a:p>
-        </p:txBody>
-      </p:sp>
-      <p:sp>
-        <p:nvSpPr>
-          <p:cNvPr id="16" name="Rounded Rectangle 15"/>
+              <a:t>1.5 m</a:t>
+            </a:r>
+          </a:p>
+        </p:txBody>
+      </p:sp>
+      <p:sp>
+        <p:nvSpPr>
+          <p:cNvPr id="20" name="Rounded Rectangle 19"/>
           <p:cNvSpPr/>
           <p:nvPr/>
         </p:nvSpPr>
         <p:spPr>
           <a:xfrm>
-            <a:off x="640080" y="4370831"/>
+            <a:off x="6172200" y="4370831"/>
             <a:ext cx="5349240" cy="868680"/>
           </a:xfrm>
           <a:prstGeom prst="roundRect">
@@ -8424,13 +8584,13 @@
       </p:sp>
       <p:sp>
         <p:nvSpPr>
-          <p:cNvPr id="17" name="Oval 16"/>
+          <p:cNvPr id="21" name="Oval 20"/>
           <p:cNvSpPr/>
           <p:nvPr/>
         </p:nvSpPr>
         <p:spPr>
           <a:xfrm>
-            <a:off x="914400" y="4599431"/>
+            <a:off x="6446520" y="4599431"/>
             <a:ext cx="411480" cy="411480"/>
           </a:xfrm>
           <a:prstGeom prst="ellipse">
@@ -8468,13 +8628,13 @@
       </p:sp>
       <p:sp>
         <p:nvSpPr>
-          <p:cNvPr id="18" name="TextBox 17"/>
+          <p:cNvPr id="22" name="TextBox 21"/>
           <p:cNvSpPr txBox="1"/>
           <p:nvPr/>
         </p:nvSpPr>
         <p:spPr>
           <a:xfrm>
-            <a:off x="914400" y="4599431"/>
+            <a:off x="6446520" y="4599431"/>
             <a:ext cx="411480" cy="411480"/>
           </a:xfrm>
           <a:prstGeom prst="rect">
@@ -8496,20 +8656,20 @@
                 </a:solidFill>
                 <a:latin typeface="Calibri"/>
               </a:rPr>
-              <a:t>C</a:t>
-            </a:r>
-          </a:p>
-        </p:txBody>
-      </p:sp>
-      <p:sp>
-        <p:nvSpPr>
-          <p:cNvPr id="19" name="TextBox 18"/>
+              <a:t>D</a:t>
+            </a:r>
+          </a:p>
+        </p:txBody>
+      </p:sp>
+      <p:sp>
+        <p:nvSpPr>
+          <p:cNvPr id="23" name="TextBox 22"/>
           <p:cNvSpPr txBox="1"/>
           <p:nvPr/>
         </p:nvSpPr>
         <p:spPr>
           <a:xfrm>
-            <a:off x="1508760" y="4370831"/>
+            <a:off x="7040880" y="4370831"/>
             <a:ext cx="4297680" cy="868680"/>
           </a:xfrm>
           <a:prstGeom prst="rect">
@@ -8531,167 +8691,7 @@
                 </a:solidFill>
                 <a:latin typeface="Calibri"/>
               </a:rPr>
-              <a:t>The same</a:t>
-            </a:r>
-          </a:p>
-        </p:txBody>
-      </p:sp>
-      <p:sp>
-        <p:nvSpPr>
-          <p:cNvPr id="20" name="Rounded Rectangle 19"/>
-          <p:cNvSpPr/>
-          <p:nvPr/>
-        </p:nvSpPr>
-        <p:spPr>
-          <a:xfrm>
-            <a:off x="6172200" y="4370831"/>
-            <a:ext cx="5349240" cy="868680"/>
-          </a:xfrm>
-          <a:prstGeom prst="roundRect">
-            <a:avLst>
-              <a:gd name="adj" fmla="val 12000"/>
-            </a:avLst>
-          </a:prstGeom>
-          <a:solidFill>
-            <a:srgbClr val="EAF1F4"/>
-          </a:solidFill>
-          <a:ln>
-            <a:noFill/>
-          </a:ln>
-          <a:effectLst/>
-        </p:spPr>
-        <p:style>
-          <a:lnRef idx="1">
-            <a:schemeClr val="accent1"/>
-          </a:lnRef>
-          <a:fillRef idx="3">
-            <a:schemeClr val="accent1"/>
-          </a:fillRef>
-          <a:effectRef idx="2">
-            <a:schemeClr val="accent1"/>
-          </a:effectRef>
-          <a:fontRef idx="minor">
-            <a:schemeClr val="lt1"/>
-          </a:fontRef>
-        </p:style>
-        <p:txBody>
-          <a:bodyPr rtlCol="0" anchor="ctr"/>
-          <a:lstStyle/>
-          <a:p>
-            <a:pPr algn="ctr"/>
-          </a:p>
-        </p:txBody>
-      </p:sp>
-      <p:sp>
-        <p:nvSpPr>
-          <p:cNvPr id="21" name="Oval 20"/>
-          <p:cNvSpPr/>
-          <p:nvPr/>
-        </p:nvSpPr>
-        <p:spPr>
-          <a:xfrm>
-            <a:off x="6446520" y="4599431"/>
-            <a:ext cx="411480" cy="411480"/>
-          </a:xfrm>
-          <a:prstGeom prst="ellipse">
-            <a:avLst/>
-          </a:prstGeom>
-          <a:solidFill>
-            <a:srgbClr val="B7C2CC"/>
-          </a:solidFill>
-          <a:ln>
-            <a:noFill/>
-          </a:ln>
-          <a:effectLst/>
-        </p:spPr>
-        <p:style>
-          <a:lnRef idx="1">
-            <a:schemeClr val="accent1"/>
-          </a:lnRef>
-          <a:fillRef idx="3">
-            <a:schemeClr val="accent1"/>
-          </a:fillRef>
-          <a:effectRef idx="2">
-            <a:schemeClr val="accent1"/>
-          </a:effectRef>
-          <a:fontRef idx="minor">
-            <a:schemeClr val="lt1"/>
-          </a:fontRef>
-        </p:style>
-        <p:txBody>
-          <a:bodyPr rtlCol="0" anchor="ctr"/>
-          <a:lstStyle/>
-          <a:p>
-            <a:pPr algn="ctr"/>
-          </a:p>
-        </p:txBody>
-      </p:sp>
-      <p:sp>
-        <p:nvSpPr>
-          <p:cNvPr id="22" name="TextBox 21"/>
-          <p:cNvSpPr txBox="1"/>
-          <p:nvPr/>
-        </p:nvSpPr>
-        <p:spPr>
-          <a:xfrm>
-            <a:off x="6446520" y="4599431"/>
-            <a:ext cx="411480" cy="411480"/>
-          </a:xfrm>
-          <a:prstGeom prst="rect">
-            <a:avLst/>
-          </a:prstGeom>
-          <a:noFill/>
-        </p:spPr>
-        <p:txBody>
-          <a:bodyPr wrap="square" anchor="ctr" lIns="0" rIns="0" tIns="0" bIns="0">
-            <a:spAutoFit/>
-          </a:bodyPr>
-          <a:lstStyle/>
-          <a:p>
-            <a:pPr algn="ctr"/>
-            <a:r>
-              <a:rPr sz="1400" b="1" i="0">
-                <a:solidFill>
-                  <a:srgbClr val="FFFFFF"/>
-                </a:solidFill>
-                <a:latin typeface="Calibri"/>
-              </a:rPr>
-              <a:t>D</a:t>
-            </a:r>
-          </a:p>
-        </p:txBody>
-      </p:sp>
-      <p:sp>
-        <p:nvSpPr>
-          <p:cNvPr id="23" name="TextBox 22"/>
-          <p:cNvSpPr txBox="1"/>
-          <p:nvPr/>
-        </p:nvSpPr>
-        <p:spPr>
-          <a:xfrm>
-            <a:off x="7040880" y="4370831"/>
-            <a:ext cx="4297680" cy="868680"/>
-          </a:xfrm>
-          <a:prstGeom prst="rect">
-            <a:avLst/>
-          </a:prstGeom>
-          <a:noFill/>
-        </p:spPr>
-        <p:txBody>
-          <a:bodyPr wrap="square" anchor="ctr" lIns="0" rIns="0" tIns="0" bIns="0">
-            <a:spAutoFit/>
-          </a:bodyPr>
-          <a:lstStyle/>
-          <a:p>
-            <a:pPr algn="l"/>
-            <a:r>
-              <a:rPr sz="1450" b="0" i="0">
-                <a:solidFill>
-                  <a:srgbClr val="6B7280"/>
-                </a:solidFill>
-                <a:latin typeface="Calibri"/>
-              </a:rPr>
-              <a:t>Twice as deep</a:t>
+              <a:t>1.33 m</a:t>
             </a:r>
           </a:p>
         </p:txBody>
@@ -8817,7 +8817,7 @@
                 </a:solidFill>
                 <a:latin typeface="Calibri"/>
               </a:rPr>
-              <a:t>Light from the bottom bends away from the normal on leaving the water and our eyes project it back along a straight line, so the bottom looks raised — apparent depth &lt; real depth.</a:t>
+              <a:t>Apparent depth = real depth / n = 2.0 / 1.33 ≈ 1.5 m. Refraction raises the apparent position, so the fish looks shallower than it really is.</a:t>
             </a:r>
           </a:p>
         </p:txBody>
@@ -9001,7 +9001,7 @@
                 </a:solidFill>
                 <a:latin typeface="Calibri"/>
               </a:rPr>
-              <a:t>Q3 — Deviation</a:t>
+              <a:t>Q3 — Atmospheric Refraction</a:t>
             </a:r>
           </a:p>
         </p:txBody>
@@ -9088,7 +9088,7 @@
                 </a:solidFill>
                 <a:latin typeface="Calibri"/>
               </a:rPr>
-              <a:t>The angle between the incident ray and the emergent ray of a prism is called the angle of:</a:t>
+              <a:t>We can see the Sun for a few minutes before it has actually risen above the horizon because:</a:t>
             </a:r>
           </a:p>
         </p:txBody>
@@ -9248,7 +9248,7 @@
                 </a:solidFill>
                 <a:latin typeface="Calibri"/>
               </a:rPr>
-              <a:t>Incidence</a:t>
+              <a:t>The Sun moves faster at dawn</a:t>
             </a:r>
           </a:p>
         </p:txBody>
@@ -9408,7 +9408,7 @@
                 </a:solidFill>
                 <a:latin typeface="Calibri"/>
               </a:rPr>
-              <a:t>Refraction</a:t>
+              <a:t>Light from the Sun is refracted by the atmosphere</a:t>
             </a:r>
           </a:p>
         </p:txBody>
@@ -9568,7 +9568,7 @@
                 </a:solidFill>
                 <a:latin typeface="Calibri"/>
               </a:rPr>
-              <a:t>Deviation</a:t>
+              <a:t>The Sun is closer at sunrise</a:t>
             </a:r>
           </a:p>
         </p:txBody>
@@ -9728,7 +9728,7 @@
                 </a:solidFill>
                 <a:latin typeface="Calibri"/>
               </a:rPr>
-              <a:t>Prism</a:t>
+              <a:t>Clouds reflect the sunlight</a:t>
             </a:r>
           </a:p>
         </p:txBody>
@@ -9912,7 +9912,7 @@
                 </a:solidFill>
                 <a:latin typeface="Calibri"/>
               </a:rPr>
-              <a:t>Q3 — Deviation</a:t>
+              <a:t>Q3 — Atmospheric Refraction</a:t>
             </a:r>
           </a:p>
         </p:txBody>
@@ -9999,7 +9999,7 @@
                 </a:solidFill>
                 <a:latin typeface="Calibri"/>
               </a:rPr>
-              <a:t>The angle between the incident ray and the emergent ray of a prism is called the angle of:</a:t>
+              <a:t>We can see the Sun for a few minutes before it has actually risen above the horizon because:</a:t>
             </a:r>
           </a:p>
         </p:txBody>
@@ -10159,7 +10159,7 @@
                 </a:solidFill>
                 <a:latin typeface="Calibri"/>
               </a:rPr>
-              <a:t>Incidence</a:t>
+              <a:t>The Sun moves faster at dawn</a:t>
             </a:r>
           </a:p>
         </p:txBody>
@@ -10173,166 +10173,6 @@
         <p:spPr>
           <a:xfrm>
             <a:off x="6172200" y="3337560"/>
-            <a:ext cx="5349240" cy="868680"/>
-          </a:xfrm>
-          <a:prstGeom prst="roundRect">
-            <a:avLst>
-              <a:gd name="adj" fmla="val 12000"/>
-            </a:avLst>
-          </a:prstGeom>
-          <a:solidFill>
-            <a:srgbClr val="EAF1F4"/>
-          </a:solidFill>
-          <a:ln>
-            <a:noFill/>
-          </a:ln>
-          <a:effectLst/>
-        </p:spPr>
-        <p:style>
-          <a:lnRef idx="1">
-            <a:schemeClr val="accent1"/>
-          </a:lnRef>
-          <a:fillRef idx="3">
-            <a:schemeClr val="accent1"/>
-          </a:fillRef>
-          <a:effectRef idx="2">
-            <a:schemeClr val="accent1"/>
-          </a:effectRef>
-          <a:fontRef idx="minor">
-            <a:schemeClr val="lt1"/>
-          </a:fontRef>
-        </p:style>
-        <p:txBody>
-          <a:bodyPr rtlCol="0" anchor="ctr"/>
-          <a:lstStyle/>
-          <a:p>
-            <a:pPr algn="ctr"/>
-          </a:p>
-        </p:txBody>
-      </p:sp>
-      <p:sp>
-        <p:nvSpPr>
-          <p:cNvPr id="13" name="Oval 12"/>
-          <p:cNvSpPr/>
-          <p:nvPr/>
-        </p:nvSpPr>
-        <p:spPr>
-          <a:xfrm>
-            <a:off x="6446520" y="3566160"/>
-            <a:ext cx="411480" cy="411480"/>
-          </a:xfrm>
-          <a:prstGeom prst="ellipse">
-            <a:avLst/>
-          </a:prstGeom>
-          <a:solidFill>
-            <a:srgbClr val="B7C2CC"/>
-          </a:solidFill>
-          <a:ln>
-            <a:noFill/>
-          </a:ln>
-          <a:effectLst/>
-        </p:spPr>
-        <p:style>
-          <a:lnRef idx="1">
-            <a:schemeClr val="accent1"/>
-          </a:lnRef>
-          <a:fillRef idx="3">
-            <a:schemeClr val="accent1"/>
-          </a:fillRef>
-          <a:effectRef idx="2">
-            <a:schemeClr val="accent1"/>
-          </a:effectRef>
-          <a:fontRef idx="minor">
-            <a:schemeClr val="lt1"/>
-          </a:fontRef>
-        </p:style>
-        <p:txBody>
-          <a:bodyPr rtlCol="0" anchor="ctr"/>
-          <a:lstStyle/>
-          <a:p>
-            <a:pPr algn="ctr"/>
-          </a:p>
-        </p:txBody>
-      </p:sp>
-      <p:sp>
-        <p:nvSpPr>
-          <p:cNvPr id="14" name="TextBox 13"/>
-          <p:cNvSpPr txBox="1"/>
-          <p:nvPr/>
-        </p:nvSpPr>
-        <p:spPr>
-          <a:xfrm>
-            <a:off x="6446520" y="3566160"/>
-            <a:ext cx="411480" cy="411480"/>
-          </a:xfrm>
-          <a:prstGeom prst="rect">
-            <a:avLst/>
-          </a:prstGeom>
-          <a:noFill/>
-        </p:spPr>
-        <p:txBody>
-          <a:bodyPr wrap="square" anchor="ctr" lIns="0" rIns="0" tIns="0" bIns="0">
-            <a:spAutoFit/>
-          </a:bodyPr>
-          <a:lstStyle/>
-          <a:p>
-            <a:pPr algn="ctr"/>
-            <a:r>
-              <a:rPr sz="1400" b="1" i="0">
-                <a:solidFill>
-                  <a:srgbClr val="FFFFFF"/>
-                </a:solidFill>
-                <a:latin typeface="Calibri"/>
-              </a:rPr>
-              <a:t>B</a:t>
-            </a:r>
-          </a:p>
-        </p:txBody>
-      </p:sp>
-      <p:sp>
-        <p:nvSpPr>
-          <p:cNvPr id="15" name="TextBox 14"/>
-          <p:cNvSpPr txBox="1"/>
-          <p:nvPr/>
-        </p:nvSpPr>
-        <p:spPr>
-          <a:xfrm>
-            <a:off x="7040880" y="3337560"/>
-            <a:ext cx="4297680" cy="868680"/>
-          </a:xfrm>
-          <a:prstGeom prst="rect">
-            <a:avLst/>
-          </a:prstGeom>
-          <a:noFill/>
-        </p:spPr>
-        <p:txBody>
-          <a:bodyPr wrap="square" anchor="ctr" lIns="0" rIns="0" tIns="0" bIns="0">
-            <a:spAutoFit/>
-          </a:bodyPr>
-          <a:lstStyle/>
-          <a:p>
-            <a:pPr algn="l"/>
-            <a:r>
-              <a:rPr sz="1450" b="0" i="0">
-                <a:solidFill>
-                  <a:srgbClr val="6B7280"/>
-                </a:solidFill>
-                <a:latin typeface="Calibri"/>
-              </a:rPr>
-              <a:t>Refraction</a:t>
-            </a:r>
-          </a:p>
-        </p:txBody>
-      </p:sp>
-      <p:sp>
-        <p:nvSpPr>
-          <p:cNvPr id="16" name="Rounded Rectangle 15"/>
-          <p:cNvSpPr/>
-          <p:nvPr/>
-        </p:nvSpPr>
-        <p:spPr>
-          <a:xfrm>
-            <a:off x="640080" y="4370831"/>
             <a:ext cx="5349240" cy="868680"/>
           </a:xfrm>
           <a:prstGeom prst="roundRect">
@@ -10374,13 +10214,13 @@
       </p:sp>
       <p:sp>
         <p:nvSpPr>
-          <p:cNvPr id="17" name="Oval 16"/>
+          <p:cNvPr id="13" name="Oval 12"/>
           <p:cNvSpPr/>
           <p:nvPr/>
         </p:nvSpPr>
         <p:spPr>
           <a:xfrm>
-            <a:off x="914400" y="4599431"/>
+            <a:off x="6446520" y="3566160"/>
             <a:ext cx="411480" cy="411480"/>
           </a:xfrm>
           <a:prstGeom prst="ellipse">
@@ -10418,13 +10258,13 @@
       </p:sp>
       <p:sp>
         <p:nvSpPr>
-          <p:cNvPr id="18" name="TextBox 17"/>
+          <p:cNvPr id="14" name="TextBox 13"/>
           <p:cNvSpPr txBox="1"/>
           <p:nvPr/>
         </p:nvSpPr>
         <p:spPr>
           <a:xfrm>
-            <a:off x="914400" y="4599431"/>
+            <a:off x="6446520" y="3566160"/>
             <a:ext cx="411480" cy="411480"/>
           </a:xfrm>
           <a:prstGeom prst="rect">
@@ -10453,13 +10293,13 @@
       </p:sp>
       <p:sp>
         <p:nvSpPr>
-          <p:cNvPr id="19" name="TextBox 18"/>
+          <p:cNvPr id="15" name="TextBox 14"/>
           <p:cNvSpPr txBox="1"/>
           <p:nvPr/>
         </p:nvSpPr>
         <p:spPr>
           <a:xfrm>
-            <a:off x="1508760" y="4370831"/>
+            <a:off x="7040880" y="3337560"/>
             <a:ext cx="4297680" cy="868680"/>
           </a:xfrm>
           <a:prstGeom prst="rect">
@@ -10481,20 +10321,20 @@
                 </a:solidFill>
                 <a:latin typeface="Calibri"/>
               </a:rPr>
-              <a:t>Deviation</a:t>
-            </a:r>
-          </a:p>
-        </p:txBody>
-      </p:sp>
-      <p:sp>
-        <p:nvSpPr>
-          <p:cNvPr id="20" name="Rounded Rectangle 19"/>
+              <a:t>Light from the Sun is refracted by the atmosphere</a:t>
+            </a:r>
+          </a:p>
+        </p:txBody>
+      </p:sp>
+      <p:sp>
+        <p:nvSpPr>
+          <p:cNvPr id="16" name="Rounded Rectangle 15"/>
           <p:cNvSpPr/>
           <p:nvPr/>
         </p:nvSpPr>
         <p:spPr>
           <a:xfrm>
-            <a:off x="6172200" y="4370831"/>
+            <a:off x="640080" y="4370831"/>
             <a:ext cx="5349240" cy="868680"/>
           </a:xfrm>
           <a:prstGeom prst="roundRect">
@@ -10534,13 +10374,13 @@
       </p:sp>
       <p:sp>
         <p:nvSpPr>
-          <p:cNvPr id="21" name="Oval 20"/>
+          <p:cNvPr id="17" name="Oval 16"/>
           <p:cNvSpPr/>
           <p:nvPr/>
         </p:nvSpPr>
         <p:spPr>
           <a:xfrm>
-            <a:off x="6446520" y="4599431"/>
+            <a:off x="914400" y="4599431"/>
             <a:ext cx="411480" cy="411480"/>
           </a:xfrm>
           <a:prstGeom prst="ellipse">
@@ -10578,13 +10418,13 @@
       </p:sp>
       <p:sp>
         <p:nvSpPr>
-          <p:cNvPr id="22" name="TextBox 21"/>
+          <p:cNvPr id="18" name="TextBox 17"/>
           <p:cNvSpPr txBox="1"/>
           <p:nvPr/>
         </p:nvSpPr>
         <p:spPr>
           <a:xfrm>
-            <a:off x="6446520" y="4599431"/>
+            <a:off x="914400" y="4599431"/>
             <a:ext cx="411480" cy="411480"/>
           </a:xfrm>
           <a:prstGeom prst="rect">
@@ -10606,20 +10446,20 @@
                 </a:solidFill>
                 <a:latin typeface="Calibri"/>
               </a:rPr>
-              <a:t>D</a:t>
-            </a:r>
-          </a:p>
-        </p:txBody>
-      </p:sp>
-      <p:sp>
-        <p:nvSpPr>
-          <p:cNvPr id="23" name="TextBox 22"/>
+              <a:t>C</a:t>
+            </a:r>
+          </a:p>
+        </p:txBody>
+      </p:sp>
+      <p:sp>
+        <p:nvSpPr>
+          <p:cNvPr id="19" name="TextBox 18"/>
           <p:cNvSpPr txBox="1"/>
           <p:nvPr/>
         </p:nvSpPr>
         <p:spPr>
           <a:xfrm>
-            <a:off x="7040880" y="4370831"/>
+            <a:off x="1508760" y="4370831"/>
             <a:ext cx="4297680" cy="868680"/>
           </a:xfrm>
           <a:prstGeom prst="rect">
@@ -10641,7 +10481,167 @@
                 </a:solidFill>
                 <a:latin typeface="Calibri"/>
               </a:rPr>
-              <a:t>Prism</a:t>
+              <a:t>The Sun is closer at sunrise</a:t>
+            </a:r>
+          </a:p>
+        </p:txBody>
+      </p:sp>
+      <p:sp>
+        <p:nvSpPr>
+          <p:cNvPr id="20" name="Rounded Rectangle 19"/>
+          <p:cNvSpPr/>
+          <p:nvPr/>
+        </p:nvSpPr>
+        <p:spPr>
+          <a:xfrm>
+            <a:off x="6172200" y="4370831"/>
+            <a:ext cx="5349240" cy="868680"/>
+          </a:xfrm>
+          <a:prstGeom prst="roundRect">
+            <a:avLst>
+              <a:gd name="adj" fmla="val 12000"/>
+            </a:avLst>
+          </a:prstGeom>
+          <a:solidFill>
+            <a:srgbClr val="EAF1F4"/>
+          </a:solidFill>
+          <a:ln>
+            <a:noFill/>
+          </a:ln>
+          <a:effectLst/>
+        </p:spPr>
+        <p:style>
+          <a:lnRef idx="1">
+            <a:schemeClr val="accent1"/>
+          </a:lnRef>
+          <a:fillRef idx="3">
+            <a:schemeClr val="accent1"/>
+          </a:fillRef>
+          <a:effectRef idx="2">
+            <a:schemeClr val="accent1"/>
+          </a:effectRef>
+          <a:fontRef idx="minor">
+            <a:schemeClr val="lt1"/>
+          </a:fontRef>
+        </p:style>
+        <p:txBody>
+          <a:bodyPr rtlCol="0" anchor="ctr"/>
+          <a:lstStyle/>
+          <a:p>
+            <a:pPr algn="ctr"/>
+          </a:p>
+        </p:txBody>
+      </p:sp>
+      <p:sp>
+        <p:nvSpPr>
+          <p:cNvPr id="21" name="Oval 20"/>
+          <p:cNvSpPr/>
+          <p:nvPr/>
+        </p:nvSpPr>
+        <p:spPr>
+          <a:xfrm>
+            <a:off x="6446520" y="4599431"/>
+            <a:ext cx="411480" cy="411480"/>
+          </a:xfrm>
+          <a:prstGeom prst="ellipse">
+            <a:avLst/>
+          </a:prstGeom>
+          <a:solidFill>
+            <a:srgbClr val="B7C2CC"/>
+          </a:solidFill>
+          <a:ln>
+            <a:noFill/>
+          </a:ln>
+          <a:effectLst/>
+        </p:spPr>
+        <p:style>
+          <a:lnRef idx="1">
+            <a:schemeClr val="accent1"/>
+          </a:lnRef>
+          <a:fillRef idx="3">
+            <a:schemeClr val="accent1"/>
+          </a:fillRef>
+          <a:effectRef idx="2">
+            <a:schemeClr val="accent1"/>
+          </a:effectRef>
+          <a:fontRef idx="minor">
+            <a:schemeClr val="lt1"/>
+          </a:fontRef>
+        </p:style>
+        <p:txBody>
+          <a:bodyPr rtlCol="0" anchor="ctr"/>
+          <a:lstStyle/>
+          <a:p>
+            <a:pPr algn="ctr"/>
+          </a:p>
+        </p:txBody>
+      </p:sp>
+      <p:sp>
+        <p:nvSpPr>
+          <p:cNvPr id="22" name="TextBox 21"/>
+          <p:cNvSpPr txBox="1"/>
+          <p:nvPr/>
+        </p:nvSpPr>
+        <p:spPr>
+          <a:xfrm>
+            <a:off x="6446520" y="4599431"/>
+            <a:ext cx="411480" cy="411480"/>
+          </a:xfrm>
+          <a:prstGeom prst="rect">
+            <a:avLst/>
+          </a:prstGeom>
+          <a:noFill/>
+        </p:spPr>
+        <p:txBody>
+          <a:bodyPr wrap="square" anchor="ctr" lIns="0" rIns="0" tIns="0" bIns="0">
+            <a:spAutoFit/>
+          </a:bodyPr>
+          <a:lstStyle/>
+          <a:p>
+            <a:pPr algn="ctr"/>
+            <a:r>
+              <a:rPr sz="1400" b="1" i="0">
+                <a:solidFill>
+                  <a:srgbClr val="FFFFFF"/>
+                </a:solidFill>
+                <a:latin typeface="Calibri"/>
+              </a:rPr>
+              <a:t>D</a:t>
+            </a:r>
+          </a:p>
+        </p:txBody>
+      </p:sp>
+      <p:sp>
+        <p:nvSpPr>
+          <p:cNvPr id="23" name="TextBox 22"/>
+          <p:cNvSpPr txBox="1"/>
+          <p:nvPr/>
+        </p:nvSpPr>
+        <p:spPr>
+          <a:xfrm>
+            <a:off x="7040880" y="4370831"/>
+            <a:ext cx="4297680" cy="868680"/>
+          </a:xfrm>
+          <a:prstGeom prst="rect">
+            <a:avLst/>
+          </a:prstGeom>
+          <a:noFill/>
+        </p:spPr>
+        <p:txBody>
+          <a:bodyPr wrap="square" anchor="ctr" lIns="0" rIns="0" tIns="0" bIns="0">
+            <a:spAutoFit/>
+          </a:bodyPr>
+          <a:lstStyle/>
+          <a:p>
+            <a:pPr algn="l"/>
+            <a:r>
+              <a:rPr sz="1450" b="0" i="0">
+                <a:solidFill>
+                  <a:srgbClr val="6B7280"/>
+                </a:solidFill>
+                <a:latin typeface="Calibri"/>
+              </a:rPr>
+              <a:t>Clouds reflect the sunlight</a:t>
             </a:r>
           </a:p>
         </p:txBody>
@@ -10767,7 +10767,7 @@
                 </a:solidFill>
                 <a:latin typeface="Calibri"/>
               </a:rPr>
-              <a:t>The angle of deviation δ measures how much the prism turns the light from its original direction.</a:t>
+              <a:t>Air is denser nearer the ground, so sunlight bends as it passes through the atmosphere. This lifts the Sun's apparent position, letting us see it slightly before it actually rises (and after it sets).</a:t>
             </a:r>
           </a:p>
         </p:txBody>
@@ -13832,9 +13832,33 @@
           </a:p>
         </p:txBody>
       </p:sp>
-      <p:sp>
-        <p:nvSpPr>
-          <p:cNvPr id="8" name="TextBox 7"/>
+      <p:pic>
+        <p:nvPicPr>
+          <p:cNvPr id="8" name="Picture 7" descr="spark_FFFFFF.png"/>
+          <p:cNvPicPr>
+            <a:picLocks noChangeAspect="1"/>
+          </p:cNvPicPr>
+          <p:nvPr/>
+        </p:nvPicPr>
+        <p:blipFill>
+          <a:blip r:embed="rId2"/>
+          <a:stretch>
+            <a:fillRect/>
+          </a:stretch>
+        </p:blipFill>
+        <p:spPr>
+          <a:xfrm>
+            <a:off x="1070762" y="2323490"/>
+            <a:ext cx="281635" cy="281635"/>
+          </a:xfrm>
+          <a:prstGeom prst="rect">
+            <a:avLst/>
+          </a:prstGeom>
+        </p:spPr>
+      </p:pic>
+      <p:sp>
+        <p:nvSpPr>
+          <p:cNvPr id="9" name="TextBox 8"/>
           <p:cNvSpPr txBox="1"/>
           <p:nvPr/>
         </p:nvSpPr>
@@ -13869,7 +13893,7 @@
       </p:sp>
       <p:sp>
         <p:nvSpPr>
-          <p:cNvPr id="9" name="TextBox 8"/>
+          <p:cNvPr id="10" name="TextBox 9"/>
           <p:cNvSpPr txBox="1"/>
           <p:nvPr/>
         </p:nvSpPr>
@@ -13904,7 +13928,7 @@
       </p:sp>
       <p:sp>
         <p:nvSpPr>
-          <p:cNvPr id="10" name="Rounded Rectangle 9"/>
+          <p:cNvPr id="11" name="Rounded Rectangle 10"/>
           <p:cNvSpPr/>
           <p:nvPr/>
         </p:nvSpPr>
@@ -13956,7 +13980,7 @@
       </p:sp>
       <p:sp>
         <p:nvSpPr>
-          <p:cNvPr id="11" name="Rounded Rectangle 10"/>
+          <p:cNvPr id="12" name="Rounded Rectangle 11"/>
           <p:cNvSpPr/>
           <p:nvPr/>
         </p:nvSpPr>
@@ -14000,9 +14024,33 @@
           </a:p>
         </p:txBody>
       </p:sp>
-      <p:sp>
-        <p:nvSpPr>
-          <p:cNvPr id="12" name="TextBox 11"/>
+      <p:pic>
+        <p:nvPicPr>
+          <p:cNvPr id="13" name="Picture 12" descr="prism_FFFFFF.png"/>
+          <p:cNvPicPr>
+            <a:picLocks noChangeAspect="1"/>
+          </p:cNvPicPr>
+          <p:nvPr/>
+        </p:nvPicPr>
+        <p:blipFill>
+          <a:blip r:embed="rId3"/>
+          <a:stretch>
+            <a:fillRect/>
+          </a:stretch>
+        </p:blipFill>
+        <p:spPr>
+          <a:xfrm>
+            <a:off x="6648602" y="2323490"/>
+            <a:ext cx="281635" cy="281635"/>
+          </a:xfrm>
+          <a:prstGeom prst="rect">
+            <a:avLst/>
+          </a:prstGeom>
+        </p:spPr>
+      </p:pic>
+      <p:sp>
+        <p:nvSpPr>
+          <p:cNvPr id="14" name="TextBox 13"/>
           <p:cNvSpPr txBox="1"/>
           <p:nvPr/>
         </p:nvSpPr>
@@ -14037,7 +14085,7 @@
       </p:sp>
       <p:sp>
         <p:nvSpPr>
-          <p:cNvPr id="13" name="TextBox 12"/>
+          <p:cNvPr id="15" name="TextBox 14"/>
           <p:cNvSpPr txBox="1"/>
           <p:nvPr/>
         </p:nvSpPr>
@@ -14072,7 +14120,7 @@
       </p:sp>
       <p:sp>
         <p:nvSpPr>
-          <p:cNvPr id="14" name="Rounded Rectangle 13"/>
+          <p:cNvPr id="16" name="Rounded Rectangle 15"/>
           <p:cNvSpPr/>
           <p:nvPr/>
         </p:nvSpPr>
@@ -14124,7 +14172,7 @@
       </p:sp>
       <p:sp>
         <p:nvSpPr>
-          <p:cNvPr id="15" name="Rounded Rectangle 14"/>
+          <p:cNvPr id="17" name="Rounded Rectangle 16"/>
           <p:cNvSpPr/>
           <p:nvPr/>
         </p:nvSpPr>
@@ -14168,9 +14216,33 @@
           </a:p>
         </p:txBody>
       </p:sp>
-      <p:sp>
-        <p:nvSpPr>
-          <p:cNvPr id="16" name="TextBox 15"/>
+      <p:pic>
+        <p:nvPicPr>
+          <p:cNvPr id="18" name="Picture 17" descr="spark_FFFFFF.png"/>
+          <p:cNvPicPr>
+            <a:picLocks noChangeAspect="1"/>
+          </p:cNvPicPr>
+          <p:nvPr/>
+        </p:nvPicPr>
+        <p:blipFill>
+          <a:blip r:embed="rId2"/>
+          <a:stretch>
+            <a:fillRect/>
+          </a:stretch>
+        </p:blipFill>
+        <p:spPr>
+          <a:xfrm>
+            <a:off x="1070762" y="4152290"/>
+            <a:ext cx="281635" cy="281635"/>
+          </a:xfrm>
+          <a:prstGeom prst="rect">
+            <a:avLst/>
+          </a:prstGeom>
+        </p:spPr>
+      </p:pic>
+      <p:sp>
+        <p:nvSpPr>
+          <p:cNvPr id="19" name="TextBox 18"/>
           <p:cNvSpPr txBox="1"/>
           <p:nvPr/>
         </p:nvSpPr>
@@ -14205,7 +14277,7 @@
       </p:sp>
       <p:sp>
         <p:nvSpPr>
-          <p:cNvPr id="17" name="TextBox 16"/>
+          <p:cNvPr id="20" name="TextBox 19"/>
           <p:cNvSpPr txBox="1"/>
           <p:nvPr/>
         </p:nvSpPr>
@@ -14240,7 +14312,7 @@
       </p:sp>
       <p:sp>
         <p:nvSpPr>
-          <p:cNvPr id="18" name="Rounded Rectangle 17"/>
+          <p:cNvPr id="21" name="Rounded Rectangle 20"/>
           <p:cNvSpPr/>
           <p:nvPr/>
         </p:nvSpPr>
@@ -14292,7 +14364,7 @@
       </p:sp>
       <p:sp>
         <p:nvSpPr>
-          <p:cNvPr id="19" name="Rounded Rectangle 18"/>
+          <p:cNvPr id="22" name="Rounded Rectangle 21"/>
           <p:cNvSpPr/>
           <p:nvPr/>
         </p:nvSpPr>
@@ -14336,9 +14408,33 @@
           </a:p>
         </p:txBody>
       </p:sp>
-      <p:sp>
-        <p:nvSpPr>
-          <p:cNvPr id="20" name="TextBox 19"/>
+      <p:pic>
+        <p:nvPicPr>
+          <p:cNvPr id="23" name="Picture 22" descr="spark_FFFFFF.png"/>
+          <p:cNvPicPr>
+            <a:picLocks noChangeAspect="1"/>
+          </p:cNvPicPr>
+          <p:nvPr/>
+        </p:nvPicPr>
+        <p:blipFill>
+          <a:blip r:embed="rId2"/>
+          <a:stretch>
+            <a:fillRect/>
+          </a:stretch>
+        </p:blipFill>
+        <p:spPr>
+          <a:xfrm>
+            <a:off x="6648602" y="4152290"/>
+            <a:ext cx="281635" cy="281635"/>
+          </a:xfrm>
+          <a:prstGeom prst="rect">
+            <a:avLst/>
+          </a:prstGeom>
+        </p:spPr>
+      </p:pic>
+      <p:sp>
+        <p:nvSpPr>
+          <p:cNvPr id="24" name="TextBox 23"/>
           <p:cNvSpPr txBox="1"/>
           <p:nvPr/>
         </p:nvSpPr>
@@ -14373,7 +14469,7 @@
       </p:sp>
       <p:sp>
         <p:nvSpPr>
-          <p:cNvPr id="21" name="TextBox 20"/>
+          <p:cNvPr id="25" name="TextBox 24"/>
           <p:cNvSpPr txBox="1"/>
           <p:nvPr/>
         </p:nvSpPr>
@@ -16667,7 +16763,7 @@
                 </a:solidFill>
                 <a:latin typeface="Calibri"/>
               </a:rPr>
-              <a:t>Q1 — Critical Angle</a:t>
+              <a:t>Q1 — Will It Escape?</a:t>
             </a:r>
           </a:p>
         </p:txBody>
@@ -16754,7 +16850,7 @@
                 </a:solidFill>
                 <a:latin typeface="Calibri"/>
               </a:rPr>
-              <a:t>At the critical angle, the angle of refraction is:</a:t>
+              <a:t>Light inside glass (critical angle 42°) strikes the glass–air surface at 40°. What happens?</a:t>
             </a:r>
           </a:p>
         </p:txBody>
@@ -16914,7 +17010,7 @@
                 </a:solidFill>
                 <a:latin typeface="Calibri"/>
               </a:rPr>
-              <a:t>0°</a:t>
+              <a:t>It is totally internally reflected</a:t>
             </a:r>
           </a:p>
         </p:txBody>
@@ -17074,7 +17170,7 @@
                 </a:solidFill>
                 <a:latin typeface="Calibri"/>
               </a:rPr>
-              <a:t>45°</a:t>
+              <a:t>It refracts and passes out into the air</a:t>
             </a:r>
           </a:p>
         </p:txBody>
@@ -17234,7 +17330,7 @@
                 </a:solidFill>
                 <a:latin typeface="Calibri"/>
               </a:rPr>
-              <a:t>90°</a:t>
+              <a:t>It travels along the surface</a:t>
             </a:r>
           </a:p>
         </p:txBody>
@@ -17394,7 +17490,7 @@
                 </a:solidFill>
                 <a:latin typeface="Calibri"/>
               </a:rPr>
-              <a:t>Equal to i</a:t>
+              <a:t>It is absorbed by the glass</a:t>
             </a:r>
           </a:p>
         </p:txBody>
@@ -17578,7 +17674,7 @@
                 </a:solidFill>
                 <a:latin typeface="Calibri"/>
               </a:rPr>
-              <a:t>Q1 — Critical Angle</a:t>
+              <a:t>Q1 — Will It Escape?</a:t>
             </a:r>
           </a:p>
         </p:txBody>
@@ -17665,7 +17761,7 @@
                 </a:solidFill>
                 <a:latin typeface="Calibri"/>
               </a:rPr>
-              <a:t>At the critical angle, the angle of refraction is:</a:t>
+              <a:t>Light inside glass (critical angle 42°) strikes the glass–air surface at 40°. What happens?</a:t>
             </a:r>
           </a:p>
         </p:txBody>
@@ -17825,7 +17921,7 @@
                 </a:solidFill>
                 <a:latin typeface="Calibri"/>
               </a:rPr>
-              <a:t>0°</a:t>
+              <a:t>It is totally internally reflected</a:t>
             </a:r>
           </a:p>
         </p:txBody>
@@ -17839,166 +17935,6 @@
         <p:spPr>
           <a:xfrm>
             <a:off x="6172200" y="3337560"/>
-            <a:ext cx="5349240" cy="868680"/>
-          </a:xfrm>
-          <a:prstGeom prst="roundRect">
-            <a:avLst>
-              <a:gd name="adj" fmla="val 12000"/>
-            </a:avLst>
-          </a:prstGeom>
-          <a:solidFill>
-            <a:srgbClr val="EAF1F4"/>
-          </a:solidFill>
-          <a:ln>
-            <a:noFill/>
-          </a:ln>
-          <a:effectLst/>
-        </p:spPr>
-        <p:style>
-          <a:lnRef idx="1">
-            <a:schemeClr val="accent1"/>
-          </a:lnRef>
-          <a:fillRef idx="3">
-            <a:schemeClr val="accent1"/>
-          </a:fillRef>
-          <a:effectRef idx="2">
-            <a:schemeClr val="accent1"/>
-          </a:effectRef>
-          <a:fontRef idx="minor">
-            <a:schemeClr val="lt1"/>
-          </a:fontRef>
-        </p:style>
-        <p:txBody>
-          <a:bodyPr rtlCol="0" anchor="ctr"/>
-          <a:lstStyle/>
-          <a:p>
-            <a:pPr algn="ctr"/>
-          </a:p>
-        </p:txBody>
-      </p:sp>
-      <p:sp>
-        <p:nvSpPr>
-          <p:cNvPr id="13" name="Oval 12"/>
-          <p:cNvSpPr/>
-          <p:nvPr/>
-        </p:nvSpPr>
-        <p:spPr>
-          <a:xfrm>
-            <a:off x="6446520" y="3566160"/>
-            <a:ext cx="411480" cy="411480"/>
-          </a:xfrm>
-          <a:prstGeom prst="ellipse">
-            <a:avLst/>
-          </a:prstGeom>
-          <a:solidFill>
-            <a:srgbClr val="B7C2CC"/>
-          </a:solidFill>
-          <a:ln>
-            <a:noFill/>
-          </a:ln>
-          <a:effectLst/>
-        </p:spPr>
-        <p:style>
-          <a:lnRef idx="1">
-            <a:schemeClr val="accent1"/>
-          </a:lnRef>
-          <a:fillRef idx="3">
-            <a:schemeClr val="accent1"/>
-          </a:fillRef>
-          <a:effectRef idx="2">
-            <a:schemeClr val="accent1"/>
-          </a:effectRef>
-          <a:fontRef idx="minor">
-            <a:schemeClr val="lt1"/>
-          </a:fontRef>
-        </p:style>
-        <p:txBody>
-          <a:bodyPr rtlCol="0" anchor="ctr"/>
-          <a:lstStyle/>
-          <a:p>
-            <a:pPr algn="ctr"/>
-          </a:p>
-        </p:txBody>
-      </p:sp>
-      <p:sp>
-        <p:nvSpPr>
-          <p:cNvPr id="14" name="TextBox 13"/>
-          <p:cNvSpPr txBox="1"/>
-          <p:nvPr/>
-        </p:nvSpPr>
-        <p:spPr>
-          <a:xfrm>
-            <a:off x="6446520" y="3566160"/>
-            <a:ext cx="411480" cy="411480"/>
-          </a:xfrm>
-          <a:prstGeom prst="rect">
-            <a:avLst/>
-          </a:prstGeom>
-          <a:noFill/>
-        </p:spPr>
-        <p:txBody>
-          <a:bodyPr wrap="square" anchor="ctr" lIns="0" rIns="0" tIns="0" bIns="0">
-            <a:spAutoFit/>
-          </a:bodyPr>
-          <a:lstStyle/>
-          <a:p>
-            <a:pPr algn="ctr"/>
-            <a:r>
-              <a:rPr sz="1400" b="1" i="0">
-                <a:solidFill>
-                  <a:srgbClr val="FFFFFF"/>
-                </a:solidFill>
-                <a:latin typeface="Calibri"/>
-              </a:rPr>
-              <a:t>B</a:t>
-            </a:r>
-          </a:p>
-        </p:txBody>
-      </p:sp>
-      <p:sp>
-        <p:nvSpPr>
-          <p:cNvPr id="15" name="TextBox 14"/>
-          <p:cNvSpPr txBox="1"/>
-          <p:nvPr/>
-        </p:nvSpPr>
-        <p:spPr>
-          <a:xfrm>
-            <a:off x="7040880" y="3337560"/>
-            <a:ext cx="4297680" cy="868680"/>
-          </a:xfrm>
-          <a:prstGeom prst="rect">
-            <a:avLst/>
-          </a:prstGeom>
-          <a:noFill/>
-        </p:spPr>
-        <p:txBody>
-          <a:bodyPr wrap="square" anchor="ctr" lIns="0" rIns="0" tIns="0" bIns="0">
-            <a:spAutoFit/>
-          </a:bodyPr>
-          <a:lstStyle/>
-          <a:p>
-            <a:pPr algn="l"/>
-            <a:r>
-              <a:rPr sz="1450" b="0" i="0">
-                <a:solidFill>
-                  <a:srgbClr val="6B7280"/>
-                </a:solidFill>
-                <a:latin typeface="Calibri"/>
-              </a:rPr>
-              <a:t>45°</a:t>
-            </a:r>
-          </a:p>
-        </p:txBody>
-      </p:sp>
-      <p:sp>
-        <p:nvSpPr>
-          <p:cNvPr id="16" name="Rounded Rectangle 15"/>
-          <p:cNvSpPr/>
-          <p:nvPr/>
-        </p:nvSpPr>
-        <p:spPr>
-          <a:xfrm>
-            <a:off x="640080" y="4370831"/>
             <a:ext cx="5349240" cy="868680"/>
           </a:xfrm>
           <a:prstGeom prst="roundRect">
@@ -18040,13 +17976,13 @@
       </p:sp>
       <p:sp>
         <p:nvSpPr>
-          <p:cNvPr id="17" name="Oval 16"/>
+          <p:cNvPr id="13" name="Oval 12"/>
           <p:cNvSpPr/>
           <p:nvPr/>
         </p:nvSpPr>
         <p:spPr>
           <a:xfrm>
-            <a:off x="914400" y="4599431"/>
+            <a:off x="6446520" y="3566160"/>
             <a:ext cx="411480" cy="411480"/>
           </a:xfrm>
           <a:prstGeom prst="ellipse">
@@ -18084,13 +18020,13 @@
       </p:sp>
       <p:sp>
         <p:nvSpPr>
-          <p:cNvPr id="18" name="TextBox 17"/>
+          <p:cNvPr id="14" name="TextBox 13"/>
           <p:cNvSpPr txBox="1"/>
           <p:nvPr/>
         </p:nvSpPr>
         <p:spPr>
           <a:xfrm>
-            <a:off x="914400" y="4599431"/>
+            <a:off x="6446520" y="3566160"/>
             <a:ext cx="411480" cy="411480"/>
           </a:xfrm>
           <a:prstGeom prst="rect">
@@ -18119,13 +18055,13 @@
       </p:sp>
       <p:sp>
         <p:nvSpPr>
-          <p:cNvPr id="19" name="TextBox 18"/>
+          <p:cNvPr id="15" name="TextBox 14"/>
           <p:cNvSpPr txBox="1"/>
           <p:nvPr/>
         </p:nvSpPr>
         <p:spPr>
           <a:xfrm>
-            <a:off x="1508760" y="4370831"/>
+            <a:off x="7040880" y="3337560"/>
             <a:ext cx="4297680" cy="868680"/>
           </a:xfrm>
           <a:prstGeom prst="rect">
@@ -18147,20 +18083,20 @@
                 </a:solidFill>
                 <a:latin typeface="Calibri"/>
               </a:rPr>
-              <a:t>90°</a:t>
-            </a:r>
-          </a:p>
-        </p:txBody>
-      </p:sp>
-      <p:sp>
-        <p:nvSpPr>
-          <p:cNvPr id="20" name="Rounded Rectangle 19"/>
+              <a:t>It refracts and passes out into the air</a:t>
+            </a:r>
+          </a:p>
+        </p:txBody>
+      </p:sp>
+      <p:sp>
+        <p:nvSpPr>
+          <p:cNvPr id="16" name="Rounded Rectangle 15"/>
           <p:cNvSpPr/>
           <p:nvPr/>
         </p:nvSpPr>
         <p:spPr>
           <a:xfrm>
-            <a:off x="6172200" y="4370831"/>
+            <a:off x="640080" y="4370831"/>
             <a:ext cx="5349240" cy="868680"/>
           </a:xfrm>
           <a:prstGeom prst="roundRect">
@@ -18200,13 +18136,13 @@
       </p:sp>
       <p:sp>
         <p:nvSpPr>
-          <p:cNvPr id="21" name="Oval 20"/>
+          <p:cNvPr id="17" name="Oval 16"/>
           <p:cNvSpPr/>
           <p:nvPr/>
         </p:nvSpPr>
         <p:spPr>
           <a:xfrm>
-            <a:off x="6446520" y="4599431"/>
+            <a:off x="914400" y="4599431"/>
             <a:ext cx="411480" cy="411480"/>
           </a:xfrm>
           <a:prstGeom prst="ellipse">
@@ -18244,13 +18180,13 @@
       </p:sp>
       <p:sp>
         <p:nvSpPr>
-          <p:cNvPr id="22" name="TextBox 21"/>
+          <p:cNvPr id="18" name="TextBox 17"/>
           <p:cNvSpPr txBox="1"/>
           <p:nvPr/>
         </p:nvSpPr>
         <p:spPr>
           <a:xfrm>
-            <a:off x="6446520" y="4599431"/>
+            <a:off x="914400" y="4599431"/>
             <a:ext cx="411480" cy="411480"/>
           </a:xfrm>
           <a:prstGeom prst="rect">
@@ -18272,20 +18208,20 @@
                 </a:solidFill>
                 <a:latin typeface="Calibri"/>
               </a:rPr>
-              <a:t>D</a:t>
-            </a:r>
-          </a:p>
-        </p:txBody>
-      </p:sp>
-      <p:sp>
-        <p:nvSpPr>
-          <p:cNvPr id="23" name="TextBox 22"/>
+              <a:t>C</a:t>
+            </a:r>
+          </a:p>
+        </p:txBody>
+      </p:sp>
+      <p:sp>
+        <p:nvSpPr>
+          <p:cNvPr id="19" name="TextBox 18"/>
           <p:cNvSpPr txBox="1"/>
           <p:nvPr/>
         </p:nvSpPr>
         <p:spPr>
           <a:xfrm>
-            <a:off x="7040880" y="4370831"/>
+            <a:off x="1508760" y="4370831"/>
             <a:ext cx="4297680" cy="868680"/>
           </a:xfrm>
           <a:prstGeom prst="rect">
@@ -18307,7 +18243,167 @@
                 </a:solidFill>
                 <a:latin typeface="Calibri"/>
               </a:rPr>
-              <a:t>Equal to i</a:t>
+              <a:t>It travels along the surface</a:t>
+            </a:r>
+          </a:p>
+        </p:txBody>
+      </p:sp>
+      <p:sp>
+        <p:nvSpPr>
+          <p:cNvPr id="20" name="Rounded Rectangle 19"/>
+          <p:cNvSpPr/>
+          <p:nvPr/>
+        </p:nvSpPr>
+        <p:spPr>
+          <a:xfrm>
+            <a:off x="6172200" y="4370831"/>
+            <a:ext cx="5349240" cy="868680"/>
+          </a:xfrm>
+          <a:prstGeom prst="roundRect">
+            <a:avLst>
+              <a:gd name="adj" fmla="val 12000"/>
+            </a:avLst>
+          </a:prstGeom>
+          <a:solidFill>
+            <a:srgbClr val="EAF1F4"/>
+          </a:solidFill>
+          <a:ln>
+            <a:noFill/>
+          </a:ln>
+          <a:effectLst/>
+        </p:spPr>
+        <p:style>
+          <a:lnRef idx="1">
+            <a:schemeClr val="accent1"/>
+          </a:lnRef>
+          <a:fillRef idx="3">
+            <a:schemeClr val="accent1"/>
+          </a:fillRef>
+          <a:effectRef idx="2">
+            <a:schemeClr val="accent1"/>
+          </a:effectRef>
+          <a:fontRef idx="minor">
+            <a:schemeClr val="lt1"/>
+          </a:fontRef>
+        </p:style>
+        <p:txBody>
+          <a:bodyPr rtlCol="0" anchor="ctr"/>
+          <a:lstStyle/>
+          <a:p>
+            <a:pPr algn="ctr"/>
+          </a:p>
+        </p:txBody>
+      </p:sp>
+      <p:sp>
+        <p:nvSpPr>
+          <p:cNvPr id="21" name="Oval 20"/>
+          <p:cNvSpPr/>
+          <p:nvPr/>
+        </p:nvSpPr>
+        <p:spPr>
+          <a:xfrm>
+            <a:off x="6446520" y="4599431"/>
+            <a:ext cx="411480" cy="411480"/>
+          </a:xfrm>
+          <a:prstGeom prst="ellipse">
+            <a:avLst/>
+          </a:prstGeom>
+          <a:solidFill>
+            <a:srgbClr val="B7C2CC"/>
+          </a:solidFill>
+          <a:ln>
+            <a:noFill/>
+          </a:ln>
+          <a:effectLst/>
+        </p:spPr>
+        <p:style>
+          <a:lnRef idx="1">
+            <a:schemeClr val="accent1"/>
+          </a:lnRef>
+          <a:fillRef idx="3">
+            <a:schemeClr val="accent1"/>
+          </a:fillRef>
+          <a:effectRef idx="2">
+            <a:schemeClr val="accent1"/>
+          </a:effectRef>
+          <a:fontRef idx="minor">
+            <a:schemeClr val="lt1"/>
+          </a:fontRef>
+        </p:style>
+        <p:txBody>
+          <a:bodyPr rtlCol="0" anchor="ctr"/>
+          <a:lstStyle/>
+          <a:p>
+            <a:pPr algn="ctr"/>
+          </a:p>
+        </p:txBody>
+      </p:sp>
+      <p:sp>
+        <p:nvSpPr>
+          <p:cNvPr id="22" name="TextBox 21"/>
+          <p:cNvSpPr txBox="1"/>
+          <p:nvPr/>
+        </p:nvSpPr>
+        <p:spPr>
+          <a:xfrm>
+            <a:off x="6446520" y="4599431"/>
+            <a:ext cx="411480" cy="411480"/>
+          </a:xfrm>
+          <a:prstGeom prst="rect">
+            <a:avLst/>
+          </a:prstGeom>
+          <a:noFill/>
+        </p:spPr>
+        <p:txBody>
+          <a:bodyPr wrap="square" anchor="ctr" lIns="0" rIns="0" tIns="0" bIns="0">
+            <a:spAutoFit/>
+          </a:bodyPr>
+          <a:lstStyle/>
+          <a:p>
+            <a:pPr algn="ctr"/>
+            <a:r>
+              <a:rPr sz="1400" b="1" i="0">
+                <a:solidFill>
+                  <a:srgbClr val="FFFFFF"/>
+                </a:solidFill>
+                <a:latin typeface="Calibri"/>
+              </a:rPr>
+              <a:t>D</a:t>
+            </a:r>
+          </a:p>
+        </p:txBody>
+      </p:sp>
+      <p:sp>
+        <p:nvSpPr>
+          <p:cNvPr id="23" name="TextBox 22"/>
+          <p:cNvSpPr txBox="1"/>
+          <p:nvPr/>
+        </p:nvSpPr>
+        <p:spPr>
+          <a:xfrm>
+            <a:off x="7040880" y="4370831"/>
+            <a:ext cx="4297680" cy="868680"/>
+          </a:xfrm>
+          <a:prstGeom prst="rect">
+            <a:avLst/>
+          </a:prstGeom>
+          <a:noFill/>
+        </p:spPr>
+        <p:txBody>
+          <a:bodyPr wrap="square" anchor="ctr" lIns="0" rIns="0" tIns="0" bIns="0">
+            <a:spAutoFit/>
+          </a:bodyPr>
+          <a:lstStyle/>
+          <a:p>
+            <a:pPr algn="l"/>
+            <a:r>
+              <a:rPr sz="1450" b="0" i="0">
+                <a:solidFill>
+                  <a:srgbClr val="6B7280"/>
+                </a:solidFill>
+                <a:latin typeface="Calibri"/>
+              </a:rPr>
+              <a:t>It is absorbed by the glass</a:t>
             </a:r>
           </a:p>
         </p:txBody>
@@ -18433,7 +18529,7 @@
                 </a:solidFill>
                 <a:latin typeface="Calibri"/>
               </a:rPr>
-              <a:t>At the critical angle the refracted ray just grazes along the surface, so the angle of refraction is 90°.</a:t>
+              <a:t>40° is less than the critical angle of 42°, so the ray is still refracted out of the glass (bending away from the normal). T.I.R. would only happen if the angle exceeded 42°.</a:t>
             </a:r>
           </a:p>
         </p:txBody>
@@ -18617,7 +18713,7 @@
                 </a:solidFill>
                 <a:latin typeface="Calibri"/>
               </a:rPr>
-              <a:t>Q2 — Conditions</a:t>
+              <a:t>Q2 — Diamond vs Glass</a:t>
             </a:r>
           </a:p>
         </p:txBody>
@@ -18704,7 +18800,7 @@
                 </a:solidFill>
                 <a:latin typeface="Calibri"/>
               </a:rPr>
-              <a:t>Total internal reflection can occur only when light travels from:</a:t>
+              <a:t>A diamond (critical angle ≈ 24°) sparkles more than a glass crystal (critical angle ≈ 42°) because:</a:t>
             </a:r>
           </a:p>
         </p:txBody>
@@ -18864,7 +18960,7 @@
                 </a:solidFill>
                 <a:latin typeface="Calibri"/>
               </a:rPr>
-              <a:t>Rarer to denser medium</a:t>
+              <a:t>Diamond reflects all colours equally</a:t>
             </a:r>
           </a:p>
         </p:txBody>
@@ -19024,7 +19120,7 @@
                 </a:solidFill>
                 <a:latin typeface="Calibri"/>
               </a:rPr>
-              <a:t>Denser to rarer medium</a:t>
+              <a:t>Light meets its surfaces beyond the critical angle more often</a:t>
             </a:r>
           </a:p>
         </p:txBody>
@@ -19184,7 +19280,7 @@
                 </a:solidFill>
                 <a:latin typeface="Calibri"/>
               </a:rPr>
-              <a:t>Air to vacuum</a:t>
+              <a:t>Diamond is a better conductor</a:t>
             </a:r>
           </a:p>
         </p:txBody>
@@ -19344,7 +19440,7 @@
                 </a:solidFill>
                 <a:latin typeface="Calibri"/>
               </a:rPr>
-              <a:t>Any medium to any other</a:t>
+              <a:t>Glass absorbs more light</a:t>
             </a:r>
           </a:p>
         </p:txBody>
@@ -19738,7 +19834,7 @@
                 </a:solidFill>
                 <a:latin typeface="Calibri"/>
               </a:rPr>
-              <a:t>Q2 — Conditions</a:t>
+              <a:t>Q2 — Diamond vs Glass</a:t>
             </a:r>
           </a:p>
         </p:txBody>
@@ -19825,7 +19921,7 @@
                 </a:solidFill>
                 <a:latin typeface="Calibri"/>
               </a:rPr>
-              <a:t>Total internal reflection can occur only when light travels from:</a:t>
+              <a:t>A diamond (critical angle ≈ 24°) sparkles more than a glass crystal (critical angle ≈ 42°) because:</a:t>
             </a:r>
           </a:p>
         </p:txBody>
@@ -19985,7 +20081,7 @@
                 </a:solidFill>
                 <a:latin typeface="Calibri"/>
               </a:rPr>
-              <a:t>Rarer to denser medium</a:t>
+              <a:t>Diamond reflects all colours equally</a:t>
             </a:r>
           </a:p>
         </p:txBody>
@@ -20147,7 +20243,7 @@
                 </a:solidFill>
                 <a:latin typeface="Calibri"/>
               </a:rPr>
-              <a:t>Denser to rarer medium</a:t>
+              <a:t>Light meets its surfaces beyond the critical angle more often</a:t>
             </a:r>
           </a:p>
         </p:txBody>
@@ -20307,7 +20403,7 @@
                 </a:solidFill>
                 <a:latin typeface="Calibri"/>
               </a:rPr>
-              <a:t>Air to vacuum</a:t>
+              <a:t>Diamond is a better conductor</a:t>
             </a:r>
           </a:p>
         </p:txBody>
@@ -20467,7 +20563,7 @@
                 </a:solidFill>
                 <a:latin typeface="Calibri"/>
               </a:rPr>
-              <a:t>Any medium to any other</a:t>
+              <a:t>Glass absorbs more light</a:t>
             </a:r>
           </a:p>
         </p:txBody>
@@ -20593,7 +20689,7 @@
                 </a:solidFill>
                 <a:latin typeface="Calibri"/>
               </a:rPr>
-              <a:t>T.I.R. needs the ray to go from a denser to a rarer medium AND the angle of incidence to exceed the critical angle. Both conditions are essential.</a:t>
+              <a:t>A smaller critical angle means more rays strike the inner surfaces beyond it and undergo total internal reflection. So diamond traps and bounces light around far more than glass, giving its sparkle.</a:t>
             </a:r>
           </a:p>
         </p:txBody>
@@ -26832,9 +26928,33 @@
           </a:p>
         </p:txBody>
       </p:sp>
-      <p:sp>
-        <p:nvSpPr>
-          <p:cNvPr id="8" name="TextBox 7"/>
+      <p:pic>
+        <p:nvPicPr>
+          <p:cNvPr id="8" name="Picture 7" descr="spark_FFFFFF.png"/>
+          <p:cNvPicPr>
+            <a:picLocks noChangeAspect="1"/>
+          </p:cNvPicPr>
+          <p:nvPr/>
+        </p:nvPicPr>
+        <p:blipFill>
+          <a:blip r:embed="rId2"/>
+          <a:stretch>
+            <a:fillRect/>
+          </a:stretch>
+        </p:blipFill>
+        <p:spPr>
+          <a:xfrm>
+            <a:off x="1070762" y="2323490"/>
+            <a:ext cx="281635" cy="281635"/>
+          </a:xfrm>
+          <a:prstGeom prst="rect">
+            <a:avLst/>
+          </a:prstGeom>
+        </p:spPr>
+      </p:pic>
+      <p:sp>
+        <p:nvSpPr>
+          <p:cNvPr id="9" name="TextBox 8"/>
           <p:cNvSpPr txBox="1"/>
           <p:nvPr/>
         </p:nvSpPr>
@@ -26869,7 +26989,7 @@
       </p:sp>
       <p:sp>
         <p:nvSpPr>
-          <p:cNvPr id="9" name="TextBox 8"/>
+          <p:cNvPr id="10" name="TextBox 9"/>
           <p:cNvSpPr txBox="1"/>
           <p:nvPr/>
         </p:nvSpPr>
@@ -26904,7 +27024,7 @@
       </p:sp>
       <p:sp>
         <p:nvSpPr>
-          <p:cNvPr id="10" name="Rounded Rectangle 9"/>
+          <p:cNvPr id="11" name="Rounded Rectangle 10"/>
           <p:cNvSpPr/>
           <p:nvPr/>
         </p:nvSpPr>
@@ -26956,7 +27076,7 @@
       </p:sp>
       <p:sp>
         <p:nvSpPr>
-          <p:cNvPr id="11" name="Rounded Rectangle 10"/>
+          <p:cNvPr id="12" name="Rounded Rectangle 11"/>
           <p:cNvSpPr/>
           <p:nvPr/>
         </p:nvSpPr>
@@ -27000,9 +27120,33 @@
           </a:p>
         </p:txBody>
       </p:sp>
-      <p:sp>
-        <p:nvSpPr>
-          <p:cNvPr id="12" name="TextBox 11"/>
+      <p:pic>
+        <p:nvPicPr>
+          <p:cNvPr id="13" name="Picture 12" descr="prism_FFFFFF.png"/>
+          <p:cNvPicPr>
+            <a:picLocks noChangeAspect="1"/>
+          </p:cNvPicPr>
+          <p:nvPr/>
+        </p:nvPicPr>
+        <p:blipFill>
+          <a:blip r:embed="rId3"/>
+          <a:stretch>
+            <a:fillRect/>
+          </a:stretch>
+        </p:blipFill>
+        <p:spPr>
+          <a:xfrm>
+            <a:off x="6648602" y="2323490"/>
+            <a:ext cx="281635" cy="281635"/>
+          </a:xfrm>
+          <a:prstGeom prst="rect">
+            <a:avLst/>
+          </a:prstGeom>
+        </p:spPr>
+      </p:pic>
+      <p:sp>
+        <p:nvSpPr>
+          <p:cNvPr id="14" name="TextBox 13"/>
           <p:cNvSpPr txBox="1"/>
           <p:nvPr/>
         </p:nvSpPr>
@@ -27037,7 +27181,7 @@
       </p:sp>
       <p:sp>
         <p:nvSpPr>
-          <p:cNvPr id="13" name="TextBox 12"/>
+          <p:cNvPr id="15" name="TextBox 14"/>
           <p:cNvSpPr txBox="1"/>
           <p:nvPr/>
         </p:nvSpPr>
@@ -27072,7 +27216,7 @@
       </p:sp>
       <p:sp>
         <p:nvSpPr>
-          <p:cNvPr id="14" name="Rounded Rectangle 13"/>
+          <p:cNvPr id="16" name="Rounded Rectangle 15"/>
           <p:cNvSpPr/>
           <p:nvPr/>
         </p:nvSpPr>
@@ -27124,7 +27268,7 @@
       </p:sp>
       <p:sp>
         <p:nvSpPr>
-          <p:cNvPr id="15" name="Rounded Rectangle 14"/>
+          <p:cNvPr id="17" name="Rounded Rectangle 16"/>
           <p:cNvSpPr/>
           <p:nvPr/>
         </p:nvSpPr>
@@ -27168,9 +27312,33 @@
           </a:p>
         </p:txBody>
       </p:sp>
-      <p:sp>
-        <p:nvSpPr>
-          <p:cNvPr id="16" name="TextBox 15"/>
+      <p:pic>
+        <p:nvPicPr>
+          <p:cNvPr id="18" name="Picture 17" descr="ray_FFFFFF.png"/>
+          <p:cNvPicPr>
+            <a:picLocks noChangeAspect="1"/>
+          </p:cNvPicPr>
+          <p:nvPr/>
+        </p:nvPicPr>
+        <p:blipFill>
+          <a:blip r:embed="rId4"/>
+          <a:stretch>
+            <a:fillRect/>
+          </a:stretch>
+        </p:blipFill>
+        <p:spPr>
+          <a:xfrm>
+            <a:off x="1070762" y="4152290"/>
+            <a:ext cx="281635" cy="281635"/>
+          </a:xfrm>
+          <a:prstGeom prst="rect">
+            <a:avLst/>
+          </a:prstGeom>
+        </p:spPr>
+      </p:pic>
+      <p:sp>
+        <p:nvSpPr>
+          <p:cNvPr id="19" name="TextBox 18"/>
           <p:cNvSpPr txBox="1"/>
           <p:nvPr/>
         </p:nvSpPr>
@@ -27205,7 +27373,7 @@
       </p:sp>
       <p:sp>
         <p:nvSpPr>
-          <p:cNvPr id="17" name="TextBox 16"/>
+          <p:cNvPr id="20" name="TextBox 19"/>
           <p:cNvSpPr txBox="1"/>
           <p:nvPr/>
         </p:nvSpPr>
@@ -27240,7 +27408,7 @@
       </p:sp>
       <p:sp>
         <p:nvSpPr>
-          <p:cNvPr id="18" name="Rounded Rectangle 17"/>
+          <p:cNvPr id="21" name="Rounded Rectangle 20"/>
           <p:cNvSpPr/>
           <p:nvPr/>
         </p:nvSpPr>
@@ -27292,7 +27460,7 @@
       </p:sp>
       <p:sp>
         <p:nvSpPr>
-          <p:cNvPr id="19" name="Rounded Rectangle 18"/>
+          <p:cNvPr id="22" name="Rounded Rectangle 21"/>
           <p:cNvSpPr/>
           <p:nvPr/>
         </p:nvSpPr>
@@ -27336,9 +27504,33 @@
           </a:p>
         </p:txBody>
       </p:sp>
-      <p:sp>
-        <p:nvSpPr>
-          <p:cNvPr id="20" name="TextBox 19"/>
+      <p:pic>
+        <p:nvPicPr>
+          <p:cNvPr id="23" name="Picture 22" descr="spark_FFFFFF.png"/>
+          <p:cNvPicPr>
+            <a:picLocks noChangeAspect="1"/>
+          </p:cNvPicPr>
+          <p:nvPr/>
+        </p:nvPicPr>
+        <p:blipFill>
+          <a:blip r:embed="rId2"/>
+          <a:stretch>
+            <a:fillRect/>
+          </a:stretch>
+        </p:blipFill>
+        <p:spPr>
+          <a:xfrm>
+            <a:off x="6648602" y="4152290"/>
+            <a:ext cx="281635" cy="281635"/>
+          </a:xfrm>
+          <a:prstGeom prst="rect">
+            <a:avLst/>
+          </a:prstGeom>
+        </p:spPr>
+      </p:pic>
+      <p:sp>
+        <p:nvSpPr>
+          <p:cNvPr id="24" name="TextBox 23"/>
           <p:cNvSpPr txBox="1"/>
           <p:nvPr/>
         </p:nvSpPr>
@@ -27373,7 +27565,7 @@
       </p:sp>
       <p:sp>
         <p:nvSpPr>
-          <p:cNvPr id="21" name="TextBox 20"/>
+          <p:cNvPr id="25" name="TextBox 24"/>
           <p:cNvSpPr txBox="1"/>
           <p:nvPr/>
         </p:nvSpPr>
@@ -27688,9 +27880,33 @@
           </a:p>
         </p:txBody>
       </p:sp>
-      <p:sp>
-        <p:nvSpPr>
-          <p:cNvPr id="8" name="TextBox 7"/>
+      <p:pic>
+        <p:nvPicPr>
+          <p:cNvPr id="8" name="Picture 7" descr="sun_FFFFFF.png"/>
+          <p:cNvPicPr>
+            <a:picLocks noChangeAspect="1"/>
+          </p:cNvPicPr>
+          <p:nvPr/>
+        </p:nvPicPr>
+        <p:blipFill>
+          <a:blip r:embed="rId2"/>
+          <a:stretch>
+            <a:fillRect/>
+          </a:stretch>
+        </p:blipFill>
+        <p:spPr>
+          <a:xfrm>
+            <a:off x="1070762" y="2323490"/>
+            <a:ext cx="281635" cy="281635"/>
+          </a:xfrm>
+          <a:prstGeom prst="rect">
+            <a:avLst/>
+          </a:prstGeom>
+        </p:spPr>
+      </p:pic>
+      <p:sp>
+        <p:nvSpPr>
+          <p:cNvPr id="9" name="TextBox 8"/>
           <p:cNvSpPr txBox="1"/>
           <p:nvPr/>
         </p:nvSpPr>
@@ -27725,7 +27941,7 @@
       </p:sp>
       <p:sp>
         <p:nvSpPr>
-          <p:cNvPr id="9" name="TextBox 8"/>
+          <p:cNvPr id="10" name="TextBox 9"/>
           <p:cNvSpPr txBox="1"/>
           <p:nvPr/>
         </p:nvSpPr>
@@ -27760,7 +27976,7 @@
       </p:sp>
       <p:sp>
         <p:nvSpPr>
-          <p:cNvPr id="10" name="Rounded Rectangle 9"/>
+          <p:cNvPr id="11" name="Rounded Rectangle 10"/>
           <p:cNvSpPr/>
           <p:nvPr/>
         </p:nvSpPr>
@@ -27812,7 +28028,7 @@
       </p:sp>
       <p:sp>
         <p:nvSpPr>
-          <p:cNvPr id="11" name="Rounded Rectangle 10"/>
+          <p:cNvPr id="12" name="Rounded Rectangle 11"/>
           <p:cNvSpPr/>
           <p:nvPr/>
         </p:nvSpPr>
@@ -27856,9 +28072,33 @@
           </a:p>
         </p:txBody>
       </p:sp>
-      <p:sp>
-        <p:nvSpPr>
-          <p:cNvPr id="12" name="TextBox 11"/>
+      <p:pic>
+        <p:nvPicPr>
+          <p:cNvPr id="13" name="Picture 12" descr="sun_FFFFFF.png"/>
+          <p:cNvPicPr>
+            <a:picLocks noChangeAspect="1"/>
+          </p:cNvPicPr>
+          <p:nvPr/>
+        </p:nvPicPr>
+        <p:blipFill>
+          <a:blip r:embed="rId2"/>
+          <a:stretch>
+            <a:fillRect/>
+          </a:stretch>
+        </p:blipFill>
+        <p:spPr>
+          <a:xfrm>
+            <a:off x="6648602" y="2323490"/>
+            <a:ext cx="281635" cy="281635"/>
+          </a:xfrm>
+          <a:prstGeom prst="rect">
+            <a:avLst/>
+          </a:prstGeom>
+        </p:spPr>
+      </p:pic>
+      <p:sp>
+        <p:nvSpPr>
+          <p:cNvPr id="14" name="TextBox 13"/>
           <p:cNvSpPr txBox="1"/>
           <p:nvPr/>
         </p:nvSpPr>
@@ -27893,7 +28133,7 @@
       </p:sp>
       <p:sp>
         <p:nvSpPr>
-          <p:cNvPr id="13" name="TextBox 12"/>
+          <p:cNvPr id="15" name="TextBox 14"/>
           <p:cNvSpPr txBox="1"/>
           <p:nvPr/>
         </p:nvSpPr>
@@ -27928,7 +28168,7 @@
       </p:sp>
       <p:sp>
         <p:nvSpPr>
-          <p:cNvPr id="14" name="Rounded Rectangle 13"/>
+          <p:cNvPr id="16" name="Rounded Rectangle 15"/>
           <p:cNvSpPr/>
           <p:nvPr/>
         </p:nvSpPr>
@@ -27980,7 +28220,7 @@
       </p:sp>
       <p:sp>
         <p:nvSpPr>
-          <p:cNvPr id="15" name="Rounded Rectangle 14"/>
+          <p:cNvPr id="17" name="Rounded Rectangle 16"/>
           <p:cNvSpPr/>
           <p:nvPr/>
         </p:nvSpPr>
@@ -28024,9 +28264,33 @@
           </a:p>
         </p:txBody>
       </p:sp>
-      <p:sp>
-        <p:nvSpPr>
-          <p:cNvPr id="16" name="TextBox 15"/>
+      <p:pic>
+        <p:nvPicPr>
+          <p:cNvPr id="18" name="Picture 17" descr="spark_FFFFFF.png"/>
+          <p:cNvPicPr>
+            <a:picLocks noChangeAspect="1"/>
+          </p:cNvPicPr>
+          <p:nvPr/>
+        </p:nvPicPr>
+        <p:blipFill>
+          <a:blip r:embed="rId3"/>
+          <a:stretch>
+            <a:fillRect/>
+          </a:stretch>
+        </p:blipFill>
+        <p:spPr>
+          <a:xfrm>
+            <a:off x="1070762" y="4152290"/>
+            <a:ext cx="281635" cy="281635"/>
+          </a:xfrm>
+          <a:prstGeom prst="rect">
+            <a:avLst/>
+          </a:prstGeom>
+        </p:spPr>
+      </p:pic>
+      <p:sp>
+        <p:nvSpPr>
+          <p:cNvPr id="19" name="TextBox 18"/>
           <p:cNvSpPr txBox="1"/>
           <p:nvPr/>
         </p:nvSpPr>
@@ -28061,7 +28325,7 @@
       </p:sp>
       <p:sp>
         <p:nvSpPr>
-          <p:cNvPr id="17" name="TextBox 16"/>
+          <p:cNvPr id="20" name="TextBox 19"/>
           <p:cNvSpPr txBox="1"/>
           <p:nvPr/>
         </p:nvSpPr>
@@ -28096,7 +28360,7 @@
       </p:sp>
       <p:sp>
         <p:nvSpPr>
-          <p:cNvPr id="18" name="Rounded Rectangle 17"/>
+          <p:cNvPr id="21" name="Rounded Rectangle 20"/>
           <p:cNvSpPr/>
           <p:nvPr/>
         </p:nvSpPr>
@@ -28148,7 +28412,7 @@
       </p:sp>
       <p:sp>
         <p:nvSpPr>
-          <p:cNvPr id="19" name="Rounded Rectangle 18"/>
+          <p:cNvPr id="22" name="Rounded Rectangle 21"/>
           <p:cNvSpPr/>
           <p:nvPr/>
         </p:nvSpPr>
@@ -28192,9 +28456,33 @@
           </a:p>
         </p:txBody>
       </p:sp>
-      <p:sp>
-        <p:nvSpPr>
-          <p:cNvPr id="20" name="TextBox 19"/>
+      <p:pic>
+        <p:nvPicPr>
+          <p:cNvPr id="23" name="Picture 22" descr="spark_FFFFFF.png"/>
+          <p:cNvPicPr>
+            <a:picLocks noChangeAspect="1"/>
+          </p:cNvPicPr>
+          <p:nvPr/>
+        </p:nvPicPr>
+        <p:blipFill>
+          <a:blip r:embed="rId3"/>
+          <a:stretch>
+            <a:fillRect/>
+          </a:stretch>
+        </p:blipFill>
+        <p:spPr>
+          <a:xfrm>
+            <a:off x="6648602" y="4152290"/>
+            <a:ext cx="281635" cy="281635"/>
+          </a:xfrm>
+          <a:prstGeom prst="rect">
+            <a:avLst/>
+          </a:prstGeom>
+        </p:spPr>
+      </p:pic>
+      <p:sp>
+        <p:nvSpPr>
+          <p:cNvPr id="24" name="TextBox 23"/>
           <p:cNvSpPr txBox="1"/>
           <p:nvPr/>
         </p:nvSpPr>
@@ -28229,7 +28517,7 @@
       </p:sp>
       <p:sp>
         <p:nvSpPr>
-          <p:cNvPr id="21" name="TextBox 20"/>
+          <p:cNvPr id="25" name="TextBox 24"/>
           <p:cNvSpPr txBox="1"/>
           <p:nvPr/>
         </p:nvSpPr>
